--- a/docs/presentation/OKM 전력 피크 예측 발표.pptx
+++ b/docs/presentation/OKM 전력 피크 예측 발표.pptx
@@ -521,7 +521,7 @@
           <a:p>
             <a:r>
               <a:rPr lang="en-US" dirty="0"/>
-              <a:t>대회 제출용 발표 표지. 팀명과 팀원 이름은 확정 후 채운다. 주제: 다음 1시간 전력이 177 kW 이상이 될 확률을 예측해 사전 경보.</a:t>
+              <a:t>대회 제출용 발표 표지. 주제: 다음 1시간 전력이 177 kW 이상이 될 확률을 예측해 사전 경보.</a:t>
             </a:r>
             <a:endParaRPr lang="en-US" dirty="0"/>
           </a:p>
@@ -3010,7 +3010,7 @@
                 <a:ea typeface="IBM Plex Sans KR" pitchFamily="34" charset="-122"/>
                 <a:cs typeface="IBM Plex Sans KR" pitchFamily="34" charset="-120"/>
               </a:rPr>
-              <a:t>팀 [팀명] · 김정현 · 이한솔 · [팀원]</a:t>
+              <a:t>팀 LXAXMakers · 이한솔 · 김경제 · 김정현</a:t>
             </a:r>
             <a:endParaRPr lang="en-US" sz="1400" dirty="0"/>
           </a:p>
@@ -3130,7 +3130,7 @@
                 <a:ea typeface="IBM Plex Sans KR" pitchFamily="34" charset="-122"/>
                 <a:cs typeface="IBM Plex Sans KR" pitchFamily="34" charset="-120"/>
               </a:rPr>
-              <a:t>2. AI 예측모델 · 사전학습 시계열 모델 ([경제님 이름])</a:t>
+              <a:t>2. AI 예측모델 · 사전학습 시계열 모델 (김경제)</a:t>
             </a:r>
             <a:endParaRPr lang="en-US" sz="1300" dirty="0"/>
           </a:p>
@@ -28321,7 +28321,7 @@
                 <a:ea typeface="IBM Plex Sans KR" pitchFamily="34" charset="-122"/>
                 <a:cs typeface="IBM Plex Sans KR" pitchFamily="34" charset="-120"/>
               </a:rPr>
-              <a:t>([경제님 이름])</a:t>
+              <a:t>(김경제)</a:t>
             </a:r>
             <a:endParaRPr lang="en-US" sz="1500" dirty="0"/>
           </a:p>

--- a/docs/presentation/OKM 전력 피크 예측 발표.pptx
+++ b/docs/presentation/OKM 전력 피크 예측 발표.pptx
@@ -3710,7 +3710,7 @@
                 <a:ea typeface="IBM Plex Sans KR" pitchFamily="34" charset="-122"/>
                 <a:cs typeface="IBM Plex Sans KR" pitchFamily="34" charset="-120"/>
               </a:rPr>
-              <a:t>기준선을 세우고, 모든 모델을 같은 규칙으로 골랐다</a:t>
+              <a:t>기준선을 세우고 같은 규칙으로 골랐다</a:t>
             </a:r>
             <a:endParaRPr lang="en-US" sz="3000" dirty="0"/>
           </a:p>
@@ -8765,7 +8765,7 @@
                 <a:ea typeface="IBM Plex Sans KR" pitchFamily="34" charset="-122"/>
                 <a:cs typeface="IBM Plex Sans KR" pitchFamily="34" charset="-120"/>
               </a:rPr>
-              <a:t>단계마다 오차가 줄고, 트리는 RMSE와 피크 오차를 함께 봤다</a:t>
+              <a:t>단계별로 오차를 줄이고 피크 오차도 함께 봤다</a:t>
             </a:r>
             <a:endParaRPr lang="en-US" sz="3000" dirty="0"/>
           </a:p>
@@ -8977,7 +8977,7 @@
                 <a:ea typeface="IBM Plex Sans KR" pitchFamily="34" charset="-122"/>
                 <a:cs typeface="IBM Plex Sans KR" pitchFamily="34" charset="-120"/>
               </a:rPr>
-              <a:t>장기·단기 모델을 섞고, 예측을 피크 확률로 바꾼다</a:t>
+              <a:t>장·단기 모델을 섞고 피크 확률로 경보</a:t>
             </a:r>
             <a:endParaRPr lang="en-US" sz="3000" dirty="0"/>
           </a:p>
@@ -10056,7 +10056,7 @@
                 <a:ea typeface="IBM Plex Sans KR" pitchFamily="34" charset="-122"/>
                 <a:cs typeface="IBM Plex Sans KR" pitchFamily="34" charset="-120"/>
               </a:rPr>
-              <a:t>동일 Test 703시간, 앙상블이 RMSE·F1 모두 최고</a:t>
+              <a:t>Test 703시간, 앙상블이 RMSE·F1 1위</a:t>
             </a:r>
             <a:endParaRPr lang="en-US" sz="3000" dirty="0"/>
           </a:p>
@@ -14757,7 +14757,7 @@
                 <a:ea typeface="IBM Plex Sans KR" pitchFamily="34" charset="-122"/>
                 <a:cs typeface="IBM Plex Sans KR" pitchFamily="34" charset="-120"/>
               </a:rPr>
-              <a:t>오전 조업과 높은 생산이 겹치면 피크율 28.6%</a:t>
+              <a:t>오전 조업 + 높은 생산이면 피크율 28.6%</a:t>
             </a:r>
             <a:endParaRPr lang="en-US" sz="3000" dirty="0"/>
           </a:p>
@@ -15667,7 +15667,7 @@
                 <a:ea typeface="IBM Plex Sans KR" pitchFamily="34" charset="-122"/>
                 <a:cs typeface="IBM Plex Sans KR" pitchFamily="34" charset="-120"/>
               </a:rPr>
-              <a:t>피크 49시간 중 48시간 경보, 놓친 1시간은 확률 0.192</a:t>
+              <a:t>피크 49시간 중 48시간을 미리 경보</a:t>
             </a:r>
             <a:endParaRPr lang="en-US" sz="3000" dirty="0"/>
           </a:p>
@@ -16323,7 +16323,7 @@
                 <a:ea typeface="IBM Plex Sans KR" pitchFamily="34" charset="-122"/>
                 <a:cs typeface="IBM Plex Sans KR" pitchFamily="34" charset="-120"/>
               </a:rPr>
-              <a:t>오경보는 09·11·13시, 미탐지는 08·10·16시에 몰린다</a:t>
+              <a:t>오경보·미탐지가 몰리는 시간대</a:t>
             </a:r>
             <a:endParaRPr lang="en-US" sz="3000" dirty="0"/>
           </a:p>
@@ -16760,7 +16760,7 @@
                 <a:ea typeface="IBM Plex Sans KR" pitchFamily="34" charset="-122"/>
                 <a:cs typeface="IBM Plex Sans KR" pitchFamily="34" charset="-120"/>
               </a:rPr>
-              <a:t>같은 Test 703시간, 가중 앙상블이 오차·경보 모두 1위</a:t>
+              <a:t>가중 앙상블이 오차·경보 모두 1위</a:t>
             </a:r>
             <a:endParaRPr lang="en-US" sz="3000" dirty="0"/>
           </a:p>
@@ -17592,7 +17592,7 @@
                 <a:ea typeface="IBM Plex Sans KR" pitchFamily="34" charset="-122"/>
                 <a:cs typeface="IBM Plex Sans KR" pitchFamily="34" charset="-120"/>
               </a:rPr>
-              <a:t>3σ 관리한계로 공정 이상을, 피크 확률로 수요를 본다</a:t>
+              <a:t>3σ 관리한계와 피크 확률로 이중 감시</a:t>
             </a:r>
             <a:endParaRPr lang="en-US" sz="3000" dirty="0"/>
           </a:p>
@@ -20880,7 +20880,7 @@
                 <a:ea typeface="IBM Plex Sans KR" pitchFamily="34" charset="-122"/>
                 <a:cs typeface="IBM Plex Sans KR" pitchFamily="34" charset="-120"/>
               </a:rPr>
-              <a:t>제조공정 특성과 희소 피크에 맞춘 네 가지 설계</a:t>
+              <a:t>제조공정과 희소 피크에 맞춘 네 가지 설계</a:t>
             </a:r>
             <a:endParaRPr lang="en-US" sz="3000" dirty="0"/>
           </a:p>
@@ -21677,7 +21677,7 @@
                 <a:ea typeface="IBM Plex Sans KR" pitchFamily="34" charset="-122"/>
                 <a:cs typeface="IBM Plex Sans KR" pitchFamily="34" charset="-120"/>
               </a:rPr>
-              <a:t>명령 한 줄로 정제 검증부터 보고서까지 다시 만든다</a:t>
+              <a:t>명령 한 줄로 제출물 전체를 다시 만든다</a:t>
             </a:r>
             <a:endParaRPr lang="en-US" sz="3000" dirty="0"/>
           </a:p>
@@ -23825,7 +23825,7 @@
                 <a:ea typeface="IBM Plex Sans KR" pitchFamily="34" charset="-122"/>
                 <a:cs typeface="IBM Plex Sans KR" pitchFamily="34" charset="-120"/>
               </a:rPr>
-              <a:t>한 시간 앞의 전력을 예측하고, 피크를 확률로 미리 관리합니다</a:t>
+              <a:t>1시간 앞 예측으로 피크를 미리 관리합니다</a:t>
             </a:r>
             <a:endParaRPr lang="en-US" sz="3200" dirty="0"/>
           </a:p>
@@ -26072,7 +26072,7 @@
                 <a:ea typeface="IBM Plex Sans KR" pitchFamily="34" charset="-122"/>
                 <a:cs typeface="IBM Plex Sans KR" pitchFamily="34" charset="-120"/>
               </a:rPr>
-              <a:t>결측·시간 이상을 복원하고 셧다운을 따로 표시</a:t>
+              <a:t>결측·시간 이상 복원, 셧다운 별도 표시</a:t>
             </a:r>
             <a:endParaRPr lang="en-US" sz="3000" dirty="0"/>
           </a:p>
